--- a/Docs/6月月次報告_WEMEX_村山.pptx
+++ b/Docs/6月月次報告_WEMEX_村山.pptx
@@ -512,6 +512,236 @@
     </a:lvl9pPr>
   </p:notesStyle>
 </p:notesMaster>
+</file>
+
+<file path=ppt/notesSlides/notesSlide1.xml><?xml version="1.0" encoding="utf-8"?>
+<p:notes xmlns:a="http://schemas.openxmlformats.org/drawingml/2006/main" xmlns:r="http://schemas.openxmlformats.org/officeDocument/2006/relationships" xmlns:p="http://schemas.openxmlformats.org/presentationml/2006/main">
+  <p:cSld>
+    <p:spTree>
+      <p:nvGrpSpPr>
+        <p:cNvPr id="1" name=""/>
+        <p:cNvGrpSpPr/>
+        <p:nvPr/>
+      </p:nvGrpSpPr>
+      <p:grpSpPr>
+        <a:xfrm>
+          <a:off x="0" y="0"/>
+          <a:ext cx="0" cy="0"/>
+          <a:chOff x="0" y="0"/>
+          <a:chExt cx="0" cy="0"/>
+        </a:xfrm>
+      </p:grpSpPr>
+      <p:sp>
+        <p:nvSpPr>
+          <p:cNvPr id="2" name="スライド イメージ プレースホルダー 1"/>
+          <p:cNvSpPr>
+            <a:spLocks noGrp="1" noRot="1" noChangeAspect="1"/>
+          </p:cNvSpPr>
+          <p:nvPr>
+            <p:ph type="sldImg"/>
+          </p:nvPr>
+        </p:nvSpPr>
+        <p:spPr/>
+      </p:sp>
+      <p:sp>
+        <p:nvSpPr>
+          <p:cNvPr id="3" name="ノート プレースホルダー 2"/>
+          <p:cNvSpPr>
+            <a:spLocks noGrp="1"/>
+          </p:cNvSpPr>
+          <p:nvPr>
+            <p:ph type="body" idx="1"/>
+          </p:nvPr>
+        </p:nvSpPr>
+        <p:spPr/>
+        <p:txBody>
+          <a:bodyPr/>
+          <a:lstStyle/>
+          <a:p>
+            <a:r>
+              <a:rPr kumimoji="1" lang="ja-JP" altLang="en-US" dirty="0"/>
+              <a:t>これから</a:t>
+            </a:r>
+            <a:r>
+              <a:rPr kumimoji="1" lang="en-US" altLang="ja-JP" dirty="0"/>
+              <a:t>6</a:t>
+            </a:r>
+            <a:r>
+              <a:rPr kumimoji="1" lang="ja-JP" altLang="en-US" dirty="0"/>
+              <a:t>月の研修報告を行います。ウィーメックス株式会社の村山惠一郎です。よろしくお願いいたします。</a:t>
+            </a:r>
+          </a:p>
+        </p:txBody>
+      </p:sp>
+      <p:sp>
+        <p:nvSpPr>
+          <p:cNvPr id="4" name="スライド番号プレースホルダー 3"/>
+          <p:cNvSpPr>
+            <a:spLocks noGrp="1"/>
+          </p:cNvSpPr>
+          <p:nvPr>
+            <p:ph type="sldNum" sz="quarter" idx="5"/>
+          </p:nvPr>
+        </p:nvSpPr>
+        <p:spPr/>
+        <p:txBody>
+          <a:bodyPr/>
+          <a:lstStyle/>
+          <a:p>
+            <a:fld id="{73524C29-D08E-4ED8-BCF4-38B75C40CB7A}" type="slidenum">
+              <a:rPr kumimoji="1" lang="ja-JP" altLang="en-US" smtClean="0"/>
+              <a:t>1</a:t>
+            </a:fld>
+            <a:endParaRPr kumimoji="1" lang="ja-JP" altLang="en-US"/>
+          </a:p>
+        </p:txBody>
+      </p:sp>
+    </p:spTree>
+    <p:extLst>
+      <p:ext uri="{BB962C8B-B14F-4D97-AF65-F5344CB8AC3E}">
+        <p14:creationId xmlns:p14="http://schemas.microsoft.com/office/powerpoint/2010/main" val="13891630"/>
+      </p:ext>
+    </p:extLst>
+  </p:cSld>
+  <p:clrMapOvr>
+    <a:masterClrMapping/>
+  </p:clrMapOvr>
+</p:notes>
+</file>
+
+<file path=ppt/notesSlides/notesSlide2.xml><?xml version="1.0" encoding="utf-8"?>
+<p:notes xmlns:a="http://schemas.openxmlformats.org/drawingml/2006/main" xmlns:r="http://schemas.openxmlformats.org/officeDocument/2006/relationships" xmlns:p="http://schemas.openxmlformats.org/presentationml/2006/main">
+  <p:cSld>
+    <p:spTree>
+      <p:nvGrpSpPr>
+        <p:cNvPr id="1" name=""/>
+        <p:cNvGrpSpPr/>
+        <p:nvPr/>
+      </p:nvGrpSpPr>
+      <p:grpSpPr>
+        <a:xfrm>
+          <a:off x="0" y="0"/>
+          <a:ext cx="0" cy="0"/>
+          <a:chOff x="0" y="0"/>
+          <a:chExt cx="0" cy="0"/>
+        </a:xfrm>
+      </p:grpSpPr>
+      <p:sp>
+        <p:nvSpPr>
+          <p:cNvPr id="2" name="スライド イメージ プレースホルダー 1"/>
+          <p:cNvSpPr>
+            <a:spLocks noGrp="1" noRot="1" noChangeAspect="1"/>
+          </p:cNvSpPr>
+          <p:nvPr>
+            <p:ph type="sldImg"/>
+          </p:nvPr>
+        </p:nvSpPr>
+        <p:spPr/>
+      </p:sp>
+      <p:sp>
+        <p:nvSpPr>
+          <p:cNvPr id="3" name="ノート プレースホルダー 2"/>
+          <p:cNvSpPr>
+            <a:spLocks noGrp="1"/>
+          </p:cNvSpPr>
+          <p:nvPr>
+            <p:ph type="body" idx="1"/>
+          </p:nvPr>
+        </p:nvSpPr>
+        <p:spPr/>
+        <p:txBody>
+          <a:bodyPr/>
+          <a:lstStyle/>
+          <a:p>
+            <a:r>
+              <a:rPr kumimoji="1" lang="ja-JP" altLang="en-US" dirty="0"/>
+              <a:t>初めに、今月の研修概要についてご報告いたします。今月の研修の目標は２つあります。「一つ目は、ドメイン駆動設計の基本理念を理解する。２つ目は様々なツールや言語を体験して何ができるかを知る。」です。この目標を達成するにあたり、スライドに示す項目について研修を行いました。まず、</a:t>
+            </a:r>
+            <a:r>
+              <a:rPr kumimoji="1" lang="en-US" altLang="ja-JP" dirty="0"/>
+              <a:t>RESTAPI</a:t>
+            </a:r>
+            <a:r>
+              <a:rPr kumimoji="1" lang="ja-JP" altLang="en-US" dirty="0"/>
+              <a:t>について学習いたしました。本タームでは</a:t>
+            </a:r>
+            <a:r>
+              <a:rPr kumimoji="1" lang="en-US" altLang="ja-JP" dirty="0"/>
+              <a:t>API</a:t>
+            </a:r>
+            <a:r>
+              <a:rPr kumimoji="1" lang="ja-JP" altLang="en-US" dirty="0"/>
+              <a:t>がリクエストを受け、レスポンスを返す仕組みを学び、</a:t>
+            </a:r>
+            <a:r>
+              <a:rPr kumimoji="1" lang="en-US" altLang="ja-JP" dirty="0"/>
+              <a:t>API</a:t>
+            </a:r>
+            <a:r>
+              <a:rPr kumimoji="1" lang="ja-JP" altLang="en-US" dirty="0"/>
+              <a:t>型のアプリケーション開発演習を実施いたしました。その際、ドメイン駆動設計について学習し、ドメイン駆動設計に基づくシステム設計を行いました。続いて</a:t>
+            </a:r>
+            <a:r>
+              <a:rPr kumimoji="1" lang="en-US" altLang="ja-JP" dirty="0"/>
+              <a:t>Azure</a:t>
+            </a:r>
+            <a:r>
+              <a:rPr kumimoji="1" lang="ja-JP" altLang="en-US" dirty="0"/>
+              <a:t>上に</a:t>
+            </a:r>
+            <a:r>
+              <a:rPr kumimoji="1" lang="en-US" altLang="ja-JP" dirty="0"/>
+              <a:t>VM</a:t>
+            </a:r>
+            <a:r>
+              <a:rPr kumimoji="1" lang="ja-JP" altLang="en-US" dirty="0"/>
+              <a:t>や</a:t>
+            </a:r>
+            <a:r>
+              <a:rPr kumimoji="1" lang="en-US" altLang="ja-JP" dirty="0"/>
+              <a:t>DB</a:t>
+            </a:r>
+            <a:r>
+              <a:rPr kumimoji="1" lang="ja-JP" altLang="en-US" dirty="0"/>
+              <a:t>を構築し、外部および内部アクセスのネットワークを構築する演習を行いました。</a:t>
+            </a:r>
+          </a:p>
+        </p:txBody>
+      </p:sp>
+      <p:sp>
+        <p:nvSpPr>
+          <p:cNvPr id="4" name="スライド番号プレースホルダー 3"/>
+          <p:cNvSpPr>
+            <a:spLocks noGrp="1"/>
+          </p:cNvSpPr>
+          <p:nvPr>
+            <p:ph type="sldNum" sz="quarter" idx="5"/>
+          </p:nvPr>
+        </p:nvSpPr>
+        <p:spPr/>
+        <p:txBody>
+          <a:bodyPr/>
+          <a:lstStyle/>
+          <a:p>
+            <a:fld id="{73524C29-D08E-4ED8-BCF4-38B75C40CB7A}" type="slidenum">
+              <a:rPr kumimoji="1" lang="ja-JP" altLang="en-US" smtClean="0"/>
+              <a:t>2</a:t>
+            </a:fld>
+            <a:endParaRPr kumimoji="1" lang="ja-JP" altLang="en-US"/>
+          </a:p>
+        </p:txBody>
+      </p:sp>
+    </p:spTree>
+    <p:extLst>
+      <p:ext uri="{BB962C8B-B14F-4D97-AF65-F5344CB8AC3E}">
+        <p14:creationId xmlns:p14="http://schemas.microsoft.com/office/powerpoint/2010/main" val="3197319838"/>
+      </p:ext>
+    </p:extLst>
+  </p:cSld>
+  <p:clrMapOvr>
+    <a:masterClrMapping/>
+  </p:clrMapOvr>
+</p:notes>
 </file>
 
 <file path=ppt/slideLayouts/slideLayout1.xml><?xml version="1.0" encoding="utf-8"?>
@@ -5498,56 +5728,6 @@
             <a:endParaRPr lang="en-US" altLang="ja-JP" dirty="0"/>
           </a:p>
           <a:p>
-            <a:pPr lvl="1">
-              <a:lnSpc>
-                <a:spcPct val="100000"/>
-              </a:lnSpc>
-            </a:pPr>
-            <a:endParaRPr lang="en-US" altLang="ja-JP" dirty="0"/>
-          </a:p>
-          <a:p>
-            <a:pPr lvl="1">
-              <a:lnSpc>
-                <a:spcPct val="100000"/>
-              </a:lnSpc>
-            </a:pPr>
-            <a:endParaRPr lang="en-US" altLang="ja-JP" dirty="0"/>
-          </a:p>
-          <a:p>
-            <a:pPr>
-              <a:lnSpc>
-                <a:spcPct val="100000"/>
-              </a:lnSpc>
-              <a:buFont typeface="Wingdings" panose="05000000000000000000" pitchFamily="2" charset="2"/>
-              <a:buChar char="n"/>
-            </a:pPr>
-            <a:r>
-              <a:rPr lang="ja-JP" altLang="en-US" dirty="0"/>
-              <a:t>実装できた機能</a:t>
-            </a:r>
-            <a:endParaRPr lang="en-US" altLang="ja-JP" dirty="0"/>
-          </a:p>
-          <a:p>
-            <a:pPr lvl="1">
-              <a:lnSpc>
-                <a:spcPct val="100000"/>
-              </a:lnSpc>
-            </a:pPr>
-            <a:r>
-              <a:rPr lang="ja-JP" altLang="en-US" dirty="0"/>
-              <a:t>ユーザ認証機能</a:t>
-            </a:r>
-            <a:endParaRPr lang="en-US" altLang="ja-JP" dirty="0"/>
-          </a:p>
-          <a:p>
-            <a:pPr lvl="1">
-              <a:lnSpc>
-                <a:spcPct val="100000"/>
-              </a:lnSpc>
-            </a:pPr>
-            <a:endParaRPr lang="en-US" altLang="ja-JP" dirty="0"/>
-          </a:p>
-          <a:p>
             <a:pPr>
               <a:lnSpc>
                 <a:spcPct val="100000"/>
@@ -5632,7 +5812,7 @@
         </p:nvSpPr>
         <p:spPr>
           <a:xfrm rot="14135497">
-            <a:off x="9150645" y="5658278"/>
+            <a:off x="8972075" y="5543171"/>
             <a:ext cx="516270" cy="605542"/>
           </a:xfrm>
           <a:prstGeom prst="triangle">
@@ -5687,7 +5867,7 @@
         </p:nvSpPr>
         <p:spPr>
           <a:xfrm>
-            <a:off x="9396099" y="5414774"/>
+            <a:off x="9217529" y="5299667"/>
             <a:ext cx="1858335" cy="1045320"/>
           </a:xfrm>
           <a:prstGeom prst="roundRect">
@@ -5802,8 +5982,8 @@
         </p:nvSpPr>
         <p:spPr>
           <a:xfrm>
-            <a:off x="781492" y="1193082"/>
-            <a:ext cx="2727252" cy="523220"/>
+            <a:off x="781491" y="1193082"/>
+            <a:ext cx="4644523" cy="523220"/>
           </a:xfrm>
           <a:prstGeom prst="rect">
             <a:avLst/>
@@ -5821,12 +6001,8 @@
               <a:buChar char="n"/>
             </a:pPr>
             <a:r>
-              <a:rPr kumimoji="1" lang="en-US" altLang="ja-JP" sz="2800" dirty="0"/>
-              <a:t>DDD</a:t>
-            </a:r>
-            <a:r>
               <a:rPr lang="ja-JP" altLang="en-US" sz="2800" dirty="0"/>
-              <a:t>の役割</a:t>
+              <a:t>ドメイン駆動設計の役割</a:t>
             </a:r>
             <a:endParaRPr kumimoji="1" lang="en-US" altLang="ja-JP" sz="2800" dirty="0"/>
           </a:p>
@@ -5941,7 +6117,7 @@
         </p:nvSpPr>
         <p:spPr>
           <a:xfrm>
-            <a:off x="781491" y="3429000"/>
+            <a:off x="602921" y="3313893"/>
             <a:ext cx="9882965" cy="461665"/>
           </a:xfrm>
           <a:prstGeom prst="rect">
@@ -5994,13 +6170,13 @@
           <p:nvPr>
             <p:extLst>
               <p:ext uri="{D42A27DB-BD31-4B8C-83A1-F6EECF244321}">
-                <p14:modId xmlns:p14="http://schemas.microsoft.com/office/powerpoint/2010/main" val="1953165306"/>
+                <p14:modId xmlns:p14="http://schemas.microsoft.com/office/powerpoint/2010/main" val="3257597089"/>
               </p:ext>
             </p:extLst>
           </p:nvPr>
         </p:nvGraphicFramePr>
         <p:xfrm>
-          <a:off x="1776818" y="5974271"/>
+          <a:off x="1598248" y="5859164"/>
           <a:ext cx="1806354" cy="741680"/>
         </p:xfrm>
         <a:graphic>
@@ -6081,13 +6257,13 @@
           <p:nvPr>
             <p:extLst>
               <p:ext uri="{D42A27DB-BD31-4B8C-83A1-F6EECF244321}">
-                <p14:modId xmlns:p14="http://schemas.microsoft.com/office/powerpoint/2010/main" val="3747238963"/>
+                <p14:modId xmlns:p14="http://schemas.microsoft.com/office/powerpoint/2010/main" val="3595543260"/>
               </p:ext>
             </p:extLst>
           </p:nvPr>
         </p:nvGraphicFramePr>
         <p:xfrm>
-          <a:off x="1776818" y="4047364"/>
+          <a:off x="1598248" y="3932257"/>
           <a:ext cx="1806354" cy="1381760"/>
         </p:xfrm>
         <a:graphic>
@@ -6198,13 +6374,13 @@
           <p:nvPr>
             <p:extLst>
               <p:ext uri="{D42A27DB-BD31-4B8C-83A1-F6EECF244321}">
-                <p14:modId xmlns:p14="http://schemas.microsoft.com/office/powerpoint/2010/main" val="3089939747"/>
+                <p14:modId xmlns:p14="http://schemas.microsoft.com/office/powerpoint/2010/main" val="1031102305"/>
               </p:ext>
             </p:extLst>
           </p:nvPr>
         </p:nvGraphicFramePr>
         <p:xfrm>
-          <a:off x="3871432" y="4047364"/>
+          <a:off x="3692862" y="3932257"/>
           <a:ext cx="1806354" cy="1381760"/>
         </p:xfrm>
         <a:graphic>
@@ -6315,13 +6491,13 @@
           <p:nvPr>
             <p:extLst>
               <p:ext uri="{D42A27DB-BD31-4B8C-83A1-F6EECF244321}">
-                <p14:modId xmlns:p14="http://schemas.microsoft.com/office/powerpoint/2010/main" val="2833762986"/>
+                <p14:modId xmlns:p14="http://schemas.microsoft.com/office/powerpoint/2010/main" val="588275514"/>
               </p:ext>
             </p:extLst>
           </p:nvPr>
         </p:nvGraphicFramePr>
         <p:xfrm>
-          <a:off x="6997404" y="5603885"/>
+          <a:off x="6818834" y="5488778"/>
           <a:ext cx="1806354" cy="1112520"/>
         </p:xfrm>
         <a:graphic>
@@ -6424,13 +6600,13 @@
           <p:nvPr>
             <p:extLst>
               <p:ext uri="{D42A27DB-BD31-4B8C-83A1-F6EECF244321}">
-                <p14:modId xmlns:p14="http://schemas.microsoft.com/office/powerpoint/2010/main" val="4273321368"/>
+                <p14:modId xmlns:p14="http://schemas.microsoft.com/office/powerpoint/2010/main" val="1691841613"/>
               </p:ext>
             </p:extLst>
           </p:nvPr>
         </p:nvGraphicFramePr>
         <p:xfrm>
-          <a:off x="6997404" y="4047364"/>
+          <a:off x="6818834" y="3932257"/>
           <a:ext cx="1806354" cy="1010920"/>
         </p:xfrm>
         <a:graphic>
@@ -6519,13 +6695,13 @@
           <p:nvPr>
             <p:extLst>
               <p:ext uri="{D42A27DB-BD31-4B8C-83A1-F6EECF244321}">
-                <p14:modId xmlns:p14="http://schemas.microsoft.com/office/powerpoint/2010/main" val="3454427204"/>
+                <p14:modId xmlns:p14="http://schemas.microsoft.com/office/powerpoint/2010/main" val="426726904"/>
               </p:ext>
             </p:extLst>
           </p:nvPr>
         </p:nvGraphicFramePr>
         <p:xfrm>
-          <a:off x="9092018" y="4047364"/>
+          <a:off x="8913448" y="3932257"/>
           <a:ext cx="1806354" cy="1010920"/>
         </p:xfrm>
         <a:graphic>
@@ -6613,7 +6789,7 @@
         </p:nvSpPr>
         <p:spPr>
           <a:xfrm>
-            <a:off x="1712432" y="5007748"/>
+            <a:off x="1533862" y="4892641"/>
             <a:ext cx="1935125" cy="461665"/>
           </a:xfrm>
           <a:prstGeom prst="roundRect">
@@ -6667,7 +6843,7 @@
         </p:nvSpPr>
         <p:spPr>
           <a:xfrm>
-            <a:off x="3807046" y="5007748"/>
+            <a:off x="3628476" y="4892641"/>
             <a:ext cx="1935125" cy="461665"/>
           </a:xfrm>
           <a:prstGeom prst="roundRect">
@@ -6721,7 +6897,7 @@
         </p:nvSpPr>
         <p:spPr>
           <a:xfrm>
-            <a:off x="1160129" y="4946193"/>
+            <a:off x="981559" y="4831086"/>
             <a:ext cx="914400" cy="584775"/>
           </a:xfrm>
           <a:prstGeom prst="rect">
@@ -6765,7 +6941,7 @@
         </p:nvSpPr>
         <p:spPr>
           <a:xfrm>
-            <a:off x="5677786" y="4946193"/>
+            <a:off x="5499216" y="4831086"/>
             <a:ext cx="914400" cy="584775"/>
           </a:xfrm>
           <a:prstGeom prst="rect">
@@ -6804,7 +6980,7 @@
         </p:nvSpPr>
         <p:spPr>
           <a:xfrm>
-            <a:off x="6933018" y="6270982"/>
+            <a:off x="6754448" y="6155875"/>
             <a:ext cx="1935125" cy="461665"/>
           </a:xfrm>
           <a:prstGeom prst="roundRect">
@@ -6858,7 +7034,7 @@
         </p:nvSpPr>
         <p:spPr>
           <a:xfrm>
-            <a:off x="8803758" y="6209427"/>
+            <a:off x="8625188" y="6094320"/>
             <a:ext cx="914400" cy="584775"/>
           </a:xfrm>
           <a:prstGeom prst="rect">
@@ -6902,7 +7078,7 @@
         </p:nvSpPr>
         <p:spPr>
           <a:xfrm>
-            <a:off x="9334206" y="5574821"/>
+            <a:off x="9155636" y="5459714"/>
             <a:ext cx="2012804" cy="707886"/>
           </a:xfrm>
           <a:prstGeom prst="rect">
@@ -6963,7 +7139,7 @@
         </p:nvSpPr>
         <p:spPr>
           <a:xfrm>
-            <a:off x="10213077" y="3562792"/>
+            <a:off x="10034507" y="3447685"/>
             <a:ext cx="209306" cy="224109"/>
           </a:xfrm>
           <a:prstGeom prst="roundRect">
@@ -7023,7 +7199,7 @@
         </p:nvSpPr>
         <p:spPr>
           <a:xfrm>
-            <a:off x="10318814" y="3488068"/>
+            <a:off x="10140244" y="3372961"/>
             <a:ext cx="1346136" cy="369332"/>
           </a:xfrm>
           <a:prstGeom prst="rect">
@@ -7061,7 +7237,7 @@
         </p:nvCxnSpPr>
         <p:spPr>
           <a:xfrm>
-            <a:off x="2679994" y="5530968"/>
+            <a:off x="2501424" y="5415861"/>
             <a:ext cx="1" cy="443303"/>
           </a:xfrm>
           <a:prstGeom prst="straightConnector1">
@@ -7108,7 +7284,7 @@
         </p:nvCxnSpPr>
         <p:spPr>
           <a:xfrm flipH="1">
-            <a:off x="2679995" y="5469413"/>
+            <a:off x="2501425" y="5354306"/>
             <a:ext cx="2094614" cy="504858"/>
           </a:xfrm>
           <a:prstGeom prst="straightConnector1">
@@ -7155,7 +7331,7 @@
         </p:nvCxnSpPr>
         <p:spPr>
           <a:xfrm>
-            <a:off x="7900581" y="5058284"/>
+            <a:off x="7722011" y="4943177"/>
             <a:ext cx="0" cy="545601"/>
           </a:xfrm>
           <a:prstGeom prst="straightConnector1">
@@ -7202,7 +7378,7 @@
         </p:nvCxnSpPr>
         <p:spPr>
           <a:xfrm flipH="1">
-            <a:off x="7900581" y="5058284"/>
+            <a:off x="7722011" y="4943177"/>
             <a:ext cx="2094614" cy="545601"/>
           </a:xfrm>
           <a:prstGeom prst="straightConnector1">
@@ -7333,7 +7509,7 @@
         <p:spPr>
           <a:xfrm>
             <a:off x="781492" y="1193082"/>
-            <a:ext cx="2727252" cy="523220"/>
+            <a:ext cx="10515600" cy="523220"/>
           </a:xfrm>
           <a:prstGeom prst="rect">
             <a:avLst/>
@@ -7361,6 +7537,26 @@
             <a:r>
               <a:rPr kumimoji="1" lang="en-US" altLang="ja-JP" sz="2800" dirty="0" err="1"/>
               <a:t>ui</a:t>
+            </a:r>
+            <a:r>
+              <a:rPr lang="ja-JP" altLang="en-US" sz="2800" dirty="0"/>
+              <a:t>：</a:t>
+            </a:r>
+            <a:r>
+              <a:rPr lang="en-US" altLang="ja-JP" sz="2800" dirty="0"/>
+              <a:t>React</a:t>
+            </a:r>
+            <a:r>
+              <a:rPr lang="ja-JP" altLang="en-US" sz="2800" dirty="0"/>
+              <a:t>の</a:t>
+            </a:r>
+            <a:r>
+              <a:rPr lang="en-US" altLang="ja-JP" sz="2800" dirty="0"/>
+              <a:t>UI</a:t>
+            </a:r>
+            <a:r>
+              <a:rPr lang="ja-JP" altLang="en-US" sz="2800" dirty="0"/>
+              <a:t>コンポーネントライブラリ</a:t>
             </a:r>
             <a:endParaRPr kumimoji="1" lang="en-US" altLang="ja-JP" sz="2800" dirty="0"/>
           </a:p>
@@ -7472,7 +7668,15 @@
                   <a:schemeClr val="bg1"/>
                 </a:solidFill>
               </a:rPr>
-              <a:t>を実装できて楽しい</a:t>
+              <a:t>を実装できて</a:t>
+            </a:r>
+            <a:r>
+              <a:rPr lang="ja-JP" altLang="en-US" sz="2400" dirty="0">
+                <a:solidFill>
+                  <a:schemeClr val="bg1"/>
+                </a:solidFill>
+              </a:rPr>
+              <a:t>面白い</a:t>
             </a:r>
             <a:endParaRPr kumimoji="1" lang="en-US" altLang="ja-JP" sz="2400" dirty="0">
               <a:solidFill>
@@ -7487,7 +7691,23 @@
                   <a:schemeClr val="bg1"/>
                 </a:solidFill>
               </a:rPr>
-              <a:t>コンポーネントの組み合わせやソースコードが編集可能であり、</a:t>
+              <a:t>コンポーネントの組み合わせや</a:t>
+            </a:r>
+            <a:r>
+              <a:rPr lang="ja-JP" altLang="en-US" sz="2400" dirty="0">
+                <a:solidFill>
+                  <a:schemeClr val="bg1"/>
+                </a:solidFill>
+              </a:rPr>
+              <a:t>編集可能なソースコードが実現する</a:t>
+            </a:r>
+            <a:r>
+              <a:rPr kumimoji="1" lang="ja-JP" altLang="en-US" sz="2400" dirty="0">
+                <a:solidFill>
+                  <a:schemeClr val="bg1"/>
+                </a:solidFill>
+              </a:rPr>
+              <a:t>、</a:t>
             </a:r>
             <a:endParaRPr kumimoji="1" lang="en-US" altLang="ja-JP" sz="2400" dirty="0">
               <a:solidFill>
@@ -7502,7 +7722,7 @@
                   <a:schemeClr val="bg1"/>
                 </a:solidFill>
               </a:rPr>
-              <a:t>カスタマイズ性が高い</a:t>
+              <a:t>高いカスタマイズ性が魅力的である</a:t>
             </a:r>
           </a:p>
         </p:txBody>
@@ -7950,8 +8170,8 @@
         </p:nvSpPr>
         <p:spPr>
           <a:xfrm>
-            <a:off x="368300" y="1328099"/>
-            <a:ext cx="6858000" cy="523220"/>
+            <a:off x="520148" y="1288573"/>
+            <a:ext cx="7544352" cy="523220"/>
           </a:xfrm>
           <a:prstGeom prst="rect">
             <a:avLst/>
@@ -7964,10 +8184,13 @@
           </a:bodyPr>
           <a:lstStyle/>
           <a:p>
-            <a:pPr algn="ctr"/>
+            <a:pPr marL="457200" indent="-457200">
+              <a:buFont typeface="Wingdings" panose="05000000000000000000" pitchFamily="2" charset="2"/>
+              <a:buChar char="n"/>
+            </a:pPr>
             <a:r>
               <a:rPr lang="ja-JP" altLang="en-US" sz="2800" dirty="0"/>
-              <a:t>開発前後のクラス図の修正量が減少した</a:t>
+              <a:t>開発演習時にクラス図の修正量が減少した</a:t>
             </a:r>
             <a:endParaRPr lang="en-US" altLang="ja-JP" sz="2800" dirty="0"/>
           </a:p>
@@ -8668,8 +8891,12 @@
           <a:lstStyle/>
           <a:p>
             <a:r>
+              <a:rPr lang="ja-JP" altLang="en-US" dirty="0"/>
+              <a:t>発見された</a:t>
+            </a:r>
+            <a:r>
               <a:rPr kumimoji="1" lang="ja-JP" altLang="en-US" dirty="0"/>
-              <a:t>困難と克服</a:t>
+              <a:t>課題</a:t>
             </a:r>
           </a:p>
         </p:txBody>
@@ -9227,10 +9454,10 @@
       </p:grpSpPr>
       <p:cxnSp>
         <p:nvCxnSpPr>
-          <p:cNvPr id="8" name="直線コネクタ 7">
-            <a:extLst>
-              <a:ext uri="{FF2B5EF4-FFF2-40B4-BE49-F238E27FC236}">
-                <a16:creationId xmlns:a16="http://schemas.microsoft.com/office/drawing/2014/main" id="{181563DB-52FF-A809-AE08-F3A4FBBDE6D9}"/>
+          <p:cNvPr id="7" name="直線コネクタ 6">
+            <a:extLst>
+              <a:ext uri="{FF2B5EF4-FFF2-40B4-BE49-F238E27FC236}">
+                <a16:creationId xmlns:a16="http://schemas.microsoft.com/office/drawing/2014/main" id="{92403DB1-58AE-DAFF-B418-DD0C2E98C6B8}"/>
               </a:ext>
             </a:extLst>
           </p:cNvPr>
@@ -9241,8 +9468,8 @@
         </p:nvCxnSpPr>
         <p:spPr>
           <a:xfrm>
-            <a:off x="1837659" y="2257185"/>
-            <a:ext cx="8516680" cy="0"/>
+            <a:off x="1734325" y="2297716"/>
+            <a:ext cx="9198089" cy="0"/>
           </a:xfrm>
           <a:prstGeom prst="line">
             <a:avLst/>
@@ -9270,46 +9497,6 @@
       </p:cxnSp>
       <p:sp>
         <p:nvSpPr>
-          <p:cNvPr id="2" name="タイトル 1">
-            <a:extLst>
-              <a:ext uri="{FF2B5EF4-FFF2-40B4-BE49-F238E27FC236}">
-                <a16:creationId xmlns:a16="http://schemas.microsoft.com/office/drawing/2014/main" id="{45862997-2EED-7874-C8A1-CC290688AA87}"/>
-              </a:ext>
-            </a:extLst>
-          </p:cNvPr>
-          <p:cNvSpPr>
-            <a:spLocks noGrp="1"/>
-          </p:cNvSpPr>
-          <p:nvPr>
-            <p:ph type="title"/>
-          </p:nvPr>
-        </p:nvSpPr>
-        <p:spPr/>
-        <p:txBody>
-          <a:bodyPr/>
-          <a:lstStyle/>
-          <a:p>
-            <a:r>
-              <a:rPr kumimoji="1" lang="en-US" altLang="ja-JP" dirty="0"/>
-              <a:t>6</a:t>
-            </a:r>
-            <a:r>
-              <a:rPr kumimoji="1" lang="ja-JP" altLang="en-US" dirty="0"/>
-              <a:t>月のまとめ・</a:t>
-            </a:r>
-            <a:r>
-              <a:rPr kumimoji="1" lang="en-US" altLang="ja-JP" dirty="0"/>
-              <a:t>7</a:t>
-            </a:r>
-            <a:r>
-              <a:rPr kumimoji="1" lang="ja-JP" altLang="en-US" dirty="0"/>
-              <a:t>月の目標</a:t>
-            </a:r>
-          </a:p>
-        </p:txBody>
-      </p:sp>
-      <p:sp>
-        <p:nvSpPr>
           <p:cNvPr id="3" name="コンテンツ プレースホルダー 2">
             <a:extLst>
               <a:ext uri="{FF2B5EF4-FFF2-40B4-BE49-F238E27FC236}">
@@ -9536,6 +9723,46 @@
       </p:sp>
       <p:sp>
         <p:nvSpPr>
+          <p:cNvPr id="2" name="タイトル 1">
+            <a:extLst>
+              <a:ext uri="{FF2B5EF4-FFF2-40B4-BE49-F238E27FC236}">
+                <a16:creationId xmlns:a16="http://schemas.microsoft.com/office/drawing/2014/main" id="{45862997-2EED-7874-C8A1-CC290688AA87}"/>
+              </a:ext>
+            </a:extLst>
+          </p:cNvPr>
+          <p:cNvSpPr>
+            <a:spLocks noGrp="1"/>
+          </p:cNvSpPr>
+          <p:nvPr>
+            <p:ph type="title"/>
+          </p:nvPr>
+        </p:nvSpPr>
+        <p:spPr/>
+        <p:txBody>
+          <a:bodyPr/>
+          <a:lstStyle/>
+          <a:p>
+            <a:r>
+              <a:rPr kumimoji="1" lang="en-US" altLang="ja-JP" dirty="0"/>
+              <a:t>6</a:t>
+            </a:r>
+            <a:r>
+              <a:rPr kumimoji="1" lang="ja-JP" altLang="en-US" dirty="0"/>
+              <a:t>月のまとめ・</a:t>
+            </a:r>
+            <a:r>
+              <a:rPr kumimoji="1" lang="en-US" altLang="ja-JP" dirty="0"/>
+              <a:t>7</a:t>
+            </a:r>
+            <a:r>
+              <a:rPr kumimoji="1" lang="ja-JP" altLang="en-US" dirty="0"/>
+              <a:t>月の目標</a:t>
+            </a:r>
+          </a:p>
+        </p:txBody>
+      </p:sp>
+      <p:sp>
+        <p:nvSpPr>
           <p:cNvPr id="4" name="スライド番号プレースホルダー 3">
             <a:extLst>
               <a:ext uri="{FF2B5EF4-FFF2-40B4-BE49-F238E27FC236}">
@@ -9577,8 +9804,8 @@
         </p:nvSpPr>
         <p:spPr>
           <a:xfrm>
-            <a:off x="2319227" y="1906311"/>
-            <a:ext cx="7553547" cy="461665"/>
+            <a:off x="2007547" y="1940815"/>
+            <a:ext cx="8516679" cy="461665"/>
           </a:xfrm>
           <a:prstGeom prst="rect">
             <a:avLst/>
@@ -9594,7 +9821,15 @@
             <a:pPr algn="ctr"/>
             <a:r>
               <a:rPr lang="ja-JP" altLang="en-US" sz="2400" dirty="0"/>
-              <a:t>責務を整理することの利点とそのための手法を学べた</a:t>
+              <a:t>責務を整理することの利点と</a:t>
+            </a:r>
+            <a:r>
+              <a:rPr lang="en-US" altLang="ja-JP" sz="2400" dirty="0"/>
+              <a:t>DDD</a:t>
+            </a:r>
+            <a:r>
+              <a:rPr lang="ja-JP" altLang="en-US" sz="2400" dirty="0"/>
+              <a:t>を実現した設計例を学べた</a:t>
             </a:r>
             <a:endParaRPr kumimoji="1" lang="ja-JP" altLang="en-US" sz="2400" dirty="0"/>
           </a:p>
